--- a/Week-2/Day-4/AI_Code_Review_Debugging.pptx
+++ b/Week-2/Day-4/AI_Code_Review_Debugging.pptx
@@ -6814,7 +6814,7 @@
           <a:p>
             <a:fld id="{5BCAD085-E8A6-8845-BD4E-CB4CCA059FC4}" type="datetimeFigureOut">
               <a:rPr lang="en-US" smtClean="0"/>
-              <a:t>5/5/2026</a:t>
+              <a:t>5/7/2026</a:t>
             </a:fld>
             <a:endParaRPr lang="en-US"/>
           </a:p>
@@ -7021,7 +7021,7 @@
           <a:p>
             <a:fld id="{5BCAD085-E8A6-8845-BD4E-CB4CCA059FC4}" type="datetimeFigureOut">
               <a:rPr lang="en-US" smtClean="0"/>
-              <a:t>5/5/2026</a:t>
+              <a:t>5/7/2026</a:t>
             </a:fld>
             <a:endParaRPr lang="en-US"/>
           </a:p>
@@ -7201,7 +7201,7 @@
           <a:p>
             <a:fld id="{5BCAD085-E8A6-8845-BD4E-CB4CCA059FC4}" type="datetimeFigureOut">
               <a:rPr lang="en-US" smtClean="0"/>
-              <a:t>5/5/2026</a:t>
+              <a:t>5/7/2026</a:t>
             </a:fld>
             <a:endParaRPr lang="en-US"/>
           </a:p>
@@ -7406,7 +7406,7 @@
           <a:p>
             <a:fld id="{5BCAD085-E8A6-8845-BD4E-CB4CCA059FC4}" type="datetimeFigureOut">
               <a:rPr lang="en-US" smtClean="0"/>
-              <a:t>5/5/2026</a:t>
+              <a:t>5/7/2026</a:t>
             </a:fld>
             <a:endParaRPr lang="en-US"/>
           </a:p>
@@ -14144,7 +14144,7 @@
           <a:p>
             <a:fld id="{5BCAD085-E8A6-8845-BD4E-CB4CCA059FC4}" type="datetimeFigureOut">
               <a:rPr lang="en-US" smtClean="0"/>
-              <a:t>5/5/2026</a:t>
+              <a:t>5/7/2026</a:t>
             </a:fld>
             <a:endParaRPr lang="en-US"/>
           </a:p>
@@ -14418,7 +14418,7 @@
           <a:p>
             <a:fld id="{5BCAD085-E8A6-8845-BD4E-CB4CCA059FC4}" type="datetimeFigureOut">
               <a:rPr lang="en-US" smtClean="0"/>
-              <a:t>5/5/2026</a:t>
+              <a:t>5/7/2026</a:t>
             </a:fld>
             <a:endParaRPr lang="en-US"/>
           </a:p>
@@ -14821,7 +14821,7 @@
           <a:p>
             <a:fld id="{5BCAD085-E8A6-8845-BD4E-CB4CCA059FC4}" type="datetimeFigureOut">
               <a:rPr lang="en-US" smtClean="0"/>
-              <a:t>5/5/2026</a:t>
+              <a:t>5/7/2026</a:t>
             </a:fld>
             <a:endParaRPr lang="en-US"/>
           </a:p>
@@ -14939,7 +14939,7 @@
           <a:p>
             <a:fld id="{5BCAD085-E8A6-8845-BD4E-CB4CCA059FC4}" type="datetimeFigureOut">
               <a:rPr lang="en-US" smtClean="0"/>
-              <a:t>5/5/2026</a:t>
+              <a:t>5/7/2026</a:t>
             </a:fld>
             <a:endParaRPr lang="en-US"/>
           </a:p>
@@ -15034,7 +15034,7 @@
           <a:p>
             <a:fld id="{5BCAD085-E8A6-8845-BD4E-CB4CCA059FC4}" type="datetimeFigureOut">
               <a:rPr lang="en-US" smtClean="0"/>
-              <a:t>5/5/2026</a:t>
+              <a:t>5/7/2026</a:t>
             </a:fld>
             <a:endParaRPr lang="en-US"/>
           </a:p>
@@ -15326,7 +15326,7 @@
           <a:p>
             <a:fld id="{5BCAD085-E8A6-8845-BD4E-CB4CCA059FC4}" type="datetimeFigureOut">
               <a:rPr lang="en-US" smtClean="0"/>
-              <a:t>5/5/2026</a:t>
+              <a:t>5/7/2026</a:t>
             </a:fld>
             <a:endParaRPr lang="en-US"/>
           </a:p>
@@ -15606,7 +15606,7 @@
           <a:p>
             <a:fld id="{5BCAD085-E8A6-8845-BD4E-CB4CCA059FC4}" type="datetimeFigureOut">
               <a:rPr lang="en-US" smtClean="0"/>
-              <a:t>5/5/2026</a:t>
+              <a:t>5/7/2026</a:t>
             </a:fld>
             <a:endParaRPr lang="en-US"/>
           </a:p>
@@ -15856,7 +15856,7 @@
           <a:p>
             <a:fld id="{5BCAD085-E8A6-8845-BD4E-CB4CCA059FC4}" type="datetimeFigureOut">
               <a:rPr lang="en-US" smtClean="0"/>
-              <a:t>5/5/2026</a:t>
+              <a:t>5/7/2026</a:t>
             </a:fld>
             <a:endParaRPr lang="en-US"/>
           </a:p>
@@ -19483,8 +19483,14 @@
           <a:lstStyle/>
           <a:p>
             <a:r>
+              <a:rPr dirty="0"/>
               <a:t>Why This Matters</a:t>
             </a:r>
+            <a:r>
+              <a:rPr lang="en-US" dirty="0"/>
+              <a:t>(Code review)</a:t>
+            </a:r>
+            <a:endParaRPr dirty="0"/>
           </a:p>
         </p:txBody>
       </p:sp>
